--- a/sem1/ref/250541_REFPREZ_Бобрик_В.Ю_ЦОСиИ.pptx
+++ b/sem1/ref/250541_REFPREZ_Бобрик_В.Ю_ЦОСиИ.pptx
@@ -29,7 +29,7 @@
     <p:sldId id="296" r:id="rId20"/>
   </p:sldIdLst>
   <p:sldSz cx="12192000" cy="6858000"/>
-  <p:notesSz cx="6858000" cy="9144000"/>
+  <p:notesSz cx="6797675" cy="9925050"/>
   <p:defaultTextStyle>
     <a:defPPr rtl="0">
       <a:defRPr lang="ru-ru"/>
@@ -170,8 +170,8 @@
         </p:nvSpPr>
         <p:spPr>
           <a:xfrm>
-            <a:off x="0" y="0"/>
-            <a:ext cx="2971800" cy="458788"/>
+            <a:off x="0" y="1"/>
+            <a:ext cx="2945659" cy="497976"/>
           </a:xfrm>
           <a:prstGeom prst="rect">
             <a:avLst/>
@@ -202,8 +202,8 @@
         </p:nvSpPr>
         <p:spPr>
           <a:xfrm>
-            <a:off x="3884613" y="0"/>
-            <a:ext cx="2971800" cy="458788"/>
+            <a:off x="3850443" y="1"/>
+            <a:ext cx="2945659" cy="497976"/>
           </a:xfrm>
           <a:prstGeom prst="rect">
             <a:avLst/>
@@ -220,7 +220,7 @@
             <a:pPr rtl="0"/>
             <a:fld id="{0E749AC1-8D5E-4EB5-87AD-0760D45420E8}" type="datetime1">
               <a:rPr lang="ru-RU" noProof="1" smtClean="0"/>
-              <a:t>22.05.2026</a:t>
+              <a:t>25.05.2026</a:t>
             </a:fld>
             <a:endParaRPr lang="ru-RU" noProof="1"/>
           </a:p>
@@ -238,8 +238,8 @@
         </p:nvSpPr>
         <p:spPr>
           <a:xfrm>
-            <a:off x="0" y="8685213"/>
-            <a:ext cx="2971800" cy="458787"/>
+            <a:off x="0" y="9427076"/>
+            <a:ext cx="2945659" cy="497975"/>
           </a:xfrm>
           <a:prstGeom prst="rect">
             <a:avLst/>
@@ -270,8 +270,8 @@
         </p:nvSpPr>
         <p:spPr>
           <a:xfrm>
-            <a:off x="3884613" y="8685213"/>
-            <a:ext cx="2971800" cy="458787"/>
+            <a:off x="3850443" y="9427076"/>
+            <a:ext cx="2945659" cy="497975"/>
           </a:xfrm>
           <a:prstGeom prst="rect">
             <a:avLst/>
@@ -340,8 +340,8 @@
         </p:nvSpPr>
         <p:spPr>
           <a:xfrm>
-            <a:off x="0" y="0"/>
-            <a:ext cx="2971800" cy="458788"/>
+            <a:off x="0" y="1"/>
+            <a:ext cx="2945659" cy="497976"/>
           </a:xfrm>
           <a:prstGeom prst="rect">
             <a:avLst/>
@@ -372,8 +372,8 @@
         </p:nvSpPr>
         <p:spPr>
           <a:xfrm>
-            <a:off x="3884613" y="0"/>
-            <a:ext cx="2971800" cy="458788"/>
+            <a:off x="3850443" y="1"/>
+            <a:ext cx="2945659" cy="497976"/>
           </a:xfrm>
           <a:prstGeom prst="rect">
             <a:avLst/>
@@ -390,7 +390,7 @@
             <a:pPr rtl="0"/>
             <a:fld id="{0FC47C68-5B2F-42B5-95FE-C3031574EEB1}" type="datetime1">
               <a:rPr lang="ru-RU" noProof="1" smtClean="0"/>
-              <a:t>22.05.2026</a:t>
+              <a:t>25.05.2026</a:t>
             </a:fld>
             <a:endParaRPr lang="ru-RU" noProof="1"/>
           </a:p>
@@ -408,8 +408,8 @@
         </p:nvSpPr>
         <p:spPr>
           <a:xfrm>
-            <a:off x="685800" y="1143000"/>
-            <a:ext cx="5486400" cy="3086100"/>
+            <a:off x="420688" y="1239838"/>
+            <a:ext cx="5956300" cy="3351212"/>
           </a:xfrm>
           <a:prstGeom prst="rect">
             <a:avLst/>
@@ -442,8 +442,8 @@
         </p:nvSpPr>
         <p:spPr>
           <a:xfrm>
-            <a:off x="685800" y="4400550"/>
-            <a:ext cx="5486400" cy="3600450"/>
+            <a:off x="679768" y="4776430"/>
+            <a:ext cx="5438140" cy="3907990"/>
           </a:xfrm>
           <a:prstGeom prst="rect">
             <a:avLst/>
@@ -501,8 +501,8 @@
         </p:nvSpPr>
         <p:spPr>
           <a:xfrm>
-            <a:off x="0" y="8685213"/>
-            <a:ext cx="2971800" cy="458787"/>
+            <a:off x="0" y="9427076"/>
+            <a:ext cx="2945659" cy="497975"/>
           </a:xfrm>
           <a:prstGeom prst="rect">
             <a:avLst/>
@@ -533,8 +533,8 @@
         </p:nvSpPr>
         <p:spPr>
           <a:xfrm>
-            <a:off x="3884613" y="8685213"/>
-            <a:ext cx="2971800" cy="458787"/>
+            <a:off x="3850443" y="9427076"/>
+            <a:ext cx="2945659" cy="497975"/>
           </a:xfrm>
           <a:prstGeom prst="rect">
             <a:avLst/>
@@ -3413,7 +3413,7 @@
             <a:pPr rtl="0"/>
             <a:fld id="{29DF47DE-273E-488A-93E0-A11ADEA9B9C9}" type="datetime1">
               <a:rPr lang="ru-RU" noProof="1" dirty="0" smtClean="0"/>
-              <a:t>22.05.2026</a:t>
+              <a:t>25.05.2026</a:t>
             </a:fld>
             <a:endParaRPr lang="ru-RU" noProof="1"/>
           </a:p>
@@ -3708,7 +3708,7 @@
             <a:pPr rtl="0"/>
             <a:fld id="{A8853DAC-4AF5-4288-9253-BF40FCA4C3DA}" type="datetime1">
               <a:rPr lang="ru-RU" noProof="1" smtClean="0"/>
-              <a:t>22.05.2026</a:t>
+              <a:t>25.05.2026</a:t>
             </a:fld>
             <a:endParaRPr lang="ru-RU" noProof="1"/>
           </a:p>
@@ -3955,7 +3955,7 @@
             <a:pPr rtl="0"/>
             <a:fld id="{72FF79C8-D3F6-4B0D-9805-10EDB1C5EE9C}" type="datetime1">
               <a:rPr lang="ru-RU" noProof="1" smtClean="0"/>
-              <a:t>22.05.2026</a:t>
+              <a:t>25.05.2026</a:t>
             </a:fld>
             <a:endParaRPr lang="ru-RU" noProof="1"/>
           </a:p>
@@ -4494,7 +4494,7 @@
             <a:pPr rtl="0"/>
             <a:fld id="{01A6AD39-F790-4AE9-A3C0-EDD83650A5A1}" type="datetime1">
               <a:rPr lang="ru-RU" noProof="1" smtClean="0"/>
-              <a:t>22.05.2026</a:t>
+              <a:t>25.05.2026</a:t>
             </a:fld>
             <a:endParaRPr lang="ru-RU" noProof="1"/>
           </a:p>
@@ -4741,7 +4741,7 @@
             <a:pPr rtl="0"/>
             <a:fld id="{7B79C875-68A5-416C-953F-6060E3FF922E}" type="datetime1">
               <a:rPr lang="ru-RU" noProof="1" smtClean="0"/>
-              <a:t>22.05.2026</a:t>
+              <a:t>25.05.2026</a:t>
             </a:fld>
             <a:endParaRPr lang="ru-RU" noProof="1"/>
           </a:p>
@@ -5272,7 +5272,7 @@
             <a:pPr rtl="0"/>
             <a:fld id="{25177B04-ADE3-4D48-9249-8F6469DAAEB4}" type="datetime1">
               <a:rPr lang="ru-RU" noProof="1" smtClean="0"/>
-              <a:t>22.05.2026</a:t>
+              <a:t>25.05.2026</a:t>
             </a:fld>
             <a:endParaRPr lang="ru-RU" noProof="1"/>
           </a:p>
@@ -5567,7 +5567,7 @@
             <a:pPr rtl="0"/>
             <a:fld id="{9CB7D222-3BB8-4073-BC98-464DC2B015F1}" type="datetime1">
               <a:rPr lang="ru-RU" noProof="1" smtClean="0"/>
-              <a:t>22.05.2026</a:t>
+              <a:t>25.05.2026</a:t>
             </a:fld>
             <a:endParaRPr lang="ru-RU" noProof="1"/>
           </a:p>
@@ -5739,7 +5739,7 @@
             <a:pPr rtl="0"/>
             <a:fld id="{983A6F1E-4417-474E-8283-614818F2A4DB}" type="datetime1">
               <a:rPr lang="ru-RU" noProof="1" smtClean="0"/>
-              <a:t>22.05.2026</a:t>
+              <a:t>25.05.2026</a:t>
             </a:fld>
             <a:endParaRPr lang="ru-RU" noProof="1"/>
           </a:p>
@@ -5917,7 +5917,7 @@
             <a:pPr rtl="0"/>
             <a:fld id="{6CE311C0-3E11-41B8-89EC-2FF5859D4CFC}" type="datetime1">
               <a:rPr lang="ru-RU" noProof="1" smtClean="0"/>
-              <a:t>22.05.2026</a:t>
+              <a:t>25.05.2026</a:t>
             </a:fld>
             <a:endParaRPr lang="ru-RU" noProof="1"/>
           </a:p>
@@ -6085,7 +6085,7 @@
             <a:pPr rtl="0"/>
             <a:fld id="{42370B76-9E69-4F47-AA69-EACE3D52D2E7}" type="datetime1">
               <a:rPr lang="ru-RU" noProof="1" dirty="0" smtClean="0"/>
-              <a:t>22.05.2026</a:t>
+              <a:t>25.05.2026</a:t>
             </a:fld>
             <a:endParaRPr lang="ru-RU" noProof="1"/>
           </a:p>
@@ -6335,7 +6335,7 @@
             <a:pPr rtl="0"/>
             <a:fld id="{7DD5ABB4-2D0E-4613-A5D0-676E93A46986}" type="datetime1">
               <a:rPr lang="ru-RU" noProof="1" dirty="0" smtClean="0"/>
-              <a:t>22.05.2026</a:t>
+              <a:t>25.05.2026</a:t>
             </a:fld>
             <a:endParaRPr lang="ru-RU" noProof="1"/>
           </a:p>
@@ -6629,7 +6629,7 @@
             <a:pPr rtl="0"/>
             <a:fld id="{1A600C73-E6E6-4667-B4A9-574C1A31D491}" type="datetime1">
               <a:rPr lang="ru-RU" noProof="1" dirty="0" smtClean="0"/>
-              <a:t>22.05.2026</a:t>
+              <a:t>25.05.2026</a:t>
             </a:fld>
             <a:endParaRPr lang="ru-RU" noProof="1"/>
           </a:p>
@@ -7068,7 +7068,7 @@
             <a:pPr rtl="0"/>
             <a:fld id="{ABD6C61B-4BC7-450B-B521-067888A271A6}" type="datetime1">
               <a:rPr lang="ru-RU" noProof="1" smtClean="0"/>
-              <a:t>22.05.2026</a:t>
+              <a:t>25.05.2026</a:t>
             </a:fld>
             <a:endParaRPr lang="ru-RU" noProof="1"/>
           </a:p>
@@ -7185,7 +7185,7 @@
             <a:pPr rtl="0"/>
             <a:fld id="{A7369D23-9ED2-4009-8E40-364295259D64}" type="datetime1">
               <a:rPr lang="ru-RU" noProof="1" smtClean="0"/>
-              <a:t>22.05.2026</a:t>
+              <a:t>25.05.2026</a:t>
             </a:fld>
             <a:endParaRPr lang="ru-RU" noProof="1"/>
           </a:p>
@@ -7279,7 +7279,7 @@
             <a:pPr rtl="0"/>
             <a:fld id="{5B259CA2-169F-4CFE-965D-8D91E640A109}" type="datetime1">
               <a:rPr lang="ru-RU" noProof="1" smtClean="0"/>
-              <a:t>22.05.2026</a:t>
+              <a:t>25.05.2026</a:t>
             </a:fld>
             <a:endParaRPr lang="ru-RU" noProof="1"/>
           </a:p>
@@ -7560,7 +7560,7 @@
             <a:pPr rtl="0"/>
             <a:fld id="{52509601-BFB2-4950-8529-7030D9D2783A}" type="datetime1">
               <a:rPr lang="ru-RU" noProof="1" smtClean="0"/>
-              <a:t>22.05.2026</a:t>
+              <a:t>25.05.2026</a:t>
             </a:fld>
             <a:endParaRPr lang="ru-RU" noProof="1"/>
           </a:p>
@@ -7850,7 +7850,7 @@
             <a:pPr rtl="0"/>
             <a:fld id="{66AD2D47-3985-403D-BB64-6B05FCF3CD18}" type="datetime1">
               <a:rPr lang="ru-RU" noProof="1" smtClean="0"/>
-              <a:t>22.05.2026</a:t>
+              <a:t>25.05.2026</a:t>
             </a:fld>
             <a:endParaRPr lang="ru-RU" noProof="1"/>
           </a:p>
@@ -8378,7 +8378,7 @@
             <a:pPr rtl="0"/>
             <a:fld id="{802C4E0A-C8FF-40F8-8BC6-6C75382E8759}" type="datetime1">
               <a:rPr lang="ru-RU" noProof="1" dirty="0" smtClean="0"/>
-              <a:t>22.05.2026</a:t>
+              <a:t>25.05.2026</a:t>
             </a:fld>
             <a:endParaRPr lang="ru-RU" noProof="1"/>
           </a:p>
@@ -12572,8 +12572,8 @@
           </a:p>
         </p:txBody>
       </p:sp>
-      <mc:AlternateContent xmlns:mc="http://schemas.openxmlformats.org/markup-compatibility/2006">
-        <mc:Choice xmlns:a14="http://schemas.microsoft.com/office/drawing/2010/main" Requires="a14">
+      <mc:AlternateContent xmlns:mc="http://schemas.openxmlformats.org/markup-compatibility/2006" xmlns:a14="http://schemas.microsoft.com/office/drawing/2010/main">
+        <mc:Choice Requires="a14">
           <p:sp>
             <p:nvSpPr>
               <p:cNvPr id="3" name="Объект 2">
@@ -12757,7 +12757,7 @@
             </p:txBody>
           </p:sp>
         </mc:Choice>
-        <mc:Fallback>
+        <mc:Fallback xmlns="">
           <p:sp>
             <p:nvSpPr>
               <p:cNvPr id="3" name="Объект 2">
@@ -12950,8 +12950,8 @@
           </a:p>
         </p:txBody>
       </p:sp>
-      <mc:AlternateContent xmlns:mc="http://schemas.openxmlformats.org/markup-compatibility/2006">
-        <mc:Choice xmlns:a14="http://schemas.microsoft.com/office/drawing/2010/main" Requires="a14">
+      <mc:AlternateContent xmlns:mc="http://schemas.openxmlformats.org/markup-compatibility/2006" xmlns:a14="http://schemas.microsoft.com/office/drawing/2010/main">
+        <mc:Choice Requires="a14">
           <p:sp>
             <p:nvSpPr>
               <p:cNvPr id="3" name="Объект 2">
@@ -13170,7 +13170,7 @@
             </p:txBody>
           </p:sp>
         </mc:Choice>
-        <mc:Fallback>
+        <mc:Fallback xmlns="">
           <p:sp>
             <p:nvSpPr>
               <p:cNvPr id="3" name="Объект 2">
@@ -14903,16 +14903,16 @@
 <file path=customXml/itemProps2.xml><?xml version="1.0" encoding="utf-8"?>
 <ds:datastoreItem xmlns:ds="http://schemas.openxmlformats.org/officeDocument/2006/customXml" ds:itemID="{D7023227-530E-4024-91EF-312A851A758C}">
   <ds:schemaRefs>
-    <ds:schemaRef ds:uri="http://schemas.microsoft.com/office/2006/metadata/properties"/>
+    <ds:schemaRef ds:uri="http://purl.org/dc/terms/"/>
+    <ds:schemaRef ds:uri="71af3243-3dd4-4a8d-8c0d-dd76da1f02a5"/>
+    <ds:schemaRef ds:uri="16c05727-aa75-4e4a-9b5f-8a80a1165891"/>
+    <ds:schemaRef ds:uri="http://purl.org/dc/elements/1.1/"/>
+    <ds:schemaRef ds:uri="http://www.w3.org/XML/1998/namespace"/>
+    <ds:schemaRef ds:uri="http://purl.org/dc/dcmitype/"/>
     <ds:schemaRef ds:uri="http://schemas.microsoft.com/office/2006/documentManagement/types"/>
-    <ds:schemaRef ds:uri="http://purl.org/dc/terms/"/>
-    <ds:schemaRef ds:uri="http://purl.org/dc/elements/1.1/"/>
     <ds:schemaRef ds:uri="http://schemas.microsoft.com/office/infopath/2007/PartnerControls"/>
     <ds:schemaRef ds:uri="http://schemas.openxmlformats.org/package/2006/metadata/core-properties"/>
-    <ds:schemaRef ds:uri="http://purl.org/dc/dcmitype/"/>
-    <ds:schemaRef ds:uri="16c05727-aa75-4e4a-9b5f-8a80a1165891"/>
-    <ds:schemaRef ds:uri="71af3243-3dd4-4a8d-8c0d-dd76da1f02a5"/>
-    <ds:schemaRef ds:uri="http://www.w3.org/XML/1998/namespace"/>
+    <ds:schemaRef ds:uri="http://schemas.microsoft.com/office/2006/metadata/properties"/>
   </ds:schemaRefs>
 </ds:datastoreItem>
 </file>
